--- a/25-dars - Ma'ruzachi rejimi, taqdimotni saqlash (prezentatsiya, demonstratsiya va video) va himoya/25-dars - Slayd.pptx
+++ b/25-dars - Ma'ruzachi rejimi, taqdimotni saqlash (prezentatsiya, demonstratsiya va video) va himoya/25-dars - Slayd.pptx
@@ -4078,7 +4078,7 @@
                 <a:ea typeface="Calibri" pitchFamily="34" charset="-122"/>
                 <a:cs typeface="Calibri" pitchFamily="34" charset="-120"/>
               </a:rPr>
-              <a:t>Taqdimotinга ma'ruzachi eslatmalarини (Notes) yoz.</a:t>
+              <a:t>Taqdimotinga ma'ruzachi eslatmalarini (Notes) yoz.</a:t>
             </a:r>
             <a:endParaRPr lang="en-US" sz="1350" dirty="0"/>
           </a:p>
@@ -4179,7 +4179,7 @@
                 <a:ea typeface="Calibri" pitchFamily="34" charset="-122"/>
                 <a:cs typeface="Calibri" pitchFamily="34" charset="-120"/>
               </a:rPr>
-              <a:t>Win+P bilan ikki ekranli rejimни yoq va ma'ruzachi rejimини sina.</a:t>
+              <a:t>Win+P bilan ikki ekranli rejimni yoq va ma'ruzachi rejimini sina.</a:t>
             </a:r>
             <a:endParaRPr lang="en-US" sz="1350" dirty="0"/>
           </a:p>
@@ -4280,7 +4280,7 @@
                 <a:ea typeface="Calibri" pitchFamily="34" charset="-122"/>
                 <a:cs typeface="Calibri" pitchFamily="34" charset="-120"/>
               </a:rPr>
-              <a:t>Joriy slaydни tomoshabinga, eslatmalarни o'zinga ko'rsatishni sozla.</a:t>
+              <a:t>Joriy slaydni tomoshabinga, eslatmalarni o'zinga ko'rsatishni sozla.</a:t>
             </a:r>
             <a:endParaRPr lang="en-US" sz="1350" dirty="0"/>
           </a:p>
@@ -4381,7 +4381,7 @@
                 <a:ea typeface="Calibri" pitchFamily="34" charset="-122"/>
                 <a:cs typeface="Calibri" pitchFamily="34" charset="-120"/>
               </a:rPr>
-              <a:t>Taqdimot uchun alohida papka yaratиб, uни pptx, ppsx va mp4 formatларида saqla.</a:t>
+              <a:t>Taqdimot uchun alohida papka yaratib, uni pptx, ppsx va mp4 formatlarida saqla.</a:t>
             </a:r>
             <a:endParaRPr lang="en-US" sz="1350" dirty="0"/>
           </a:p>
@@ -4482,7 +4482,7 @@
                 <a:ea typeface="Calibri" pitchFamily="34" charset="-122"/>
                 <a:cs typeface="Calibri" pitchFamily="34" charset="-120"/>
               </a:rPr>
-              <a:t>Faylни parol bilan himoyala.</a:t>
+              <a:t>Faylni parol bilan himoyala.</a:t>
             </a:r>
             <a:endParaRPr lang="en-US" sz="1350" dirty="0"/>
           </a:p>
@@ -4962,7 +4962,7 @@
                 <a:ea typeface="Calibri" pitchFamily="34" charset="-122"/>
                 <a:cs typeface="Calibri" pitchFamily="34" charset="-120"/>
               </a:rPr>
-              <a:t>Taqdimotни qanday himoyalanadi?</a:t>
+              <a:t>Taqdimotni qanday himoyalanadi?</a:t>
             </a:r>
             <a:endParaRPr lang="en-US" sz="1300" dirty="0"/>
           </a:p>
@@ -5096,7 +5096,7 @@
                 <a:ea typeface="Calibri" pitchFamily="34" charset="-122"/>
                 <a:cs typeface="Calibri" pitchFamily="34" charset="-120"/>
               </a:rPr>
-              <a:t>O'z taqdimotinгизни mp4 video qilib eksport qiling va uни telefonда ko'rib chiqing.</a:t>
+              <a:t>O'z taqdimotingizni mp4 video qilib eksport qiling va uni telefonda ko'rib chiqing.</a:t>
             </a:r>
             <a:endParaRPr lang="en-US" sz="1450" dirty="0"/>
           </a:p>
